--- a/03-Static fields and methods.pptx
+++ b/03-Static fields and methods.pptx
@@ -1089,13 +1089,13 @@
       <dgm:prSet presAssocID="{20414C31-A7F2-410B-A8A2-2074AACF2012}" presName="iconRect" presStyleLbl="node1" presStyleIdx="0" presStyleCnt="2"/>
       <dgm:spPr>
         <a:blipFill>
-          <a:blip xmlns:r="http://schemas.openxmlformats.org/officeDocument/2006/relationships" r:embed="rId1">
+          <a:blip xmlns:r="http://schemas.openxmlformats.org/officeDocument/2006/relationships">
             <a:extLst>
               <a:ext uri="{28A0092B-C50C-407E-A947-70E740481C1C}">
                 <a14:useLocalDpi xmlns:a14="http://schemas.microsoft.com/office/drawing/2010/main" val="0"/>
               </a:ext>
               <a:ext uri="{96DAC541-7B7A-43D3-8B79-37D633B846F1}">
-                <asvg:svgBlip xmlns:asvg="http://schemas.microsoft.com/office/drawing/2016/SVG/main" r:embed="rId2"/>
+                <asvg:svgBlip xmlns:asvg="http://schemas.microsoft.com/office/drawing/2016/SVG/main" r:embed="rId1"/>
               </a:ext>
             </a:extLst>
           </a:blip>
@@ -1142,13 +1142,13 @@
       <dgm:prSet presAssocID="{EB544CAE-C268-4556-8B77-B6AF41E0C214}" presName="iconRect" presStyleLbl="node1" presStyleIdx="1" presStyleCnt="2"/>
       <dgm:spPr>
         <a:blipFill>
-          <a:blip xmlns:r="http://schemas.openxmlformats.org/officeDocument/2006/relationships" r:embed="rId3">
+          <a:blip xmlns:r="http://schemas.openxmlformats.org/officeDocument/2006/relationships">
             <a:extLst>
               <a:ext uri="{28A0092B-C50C-407E-A947-70E740481C1C}">
                 <a14:useLocalDpi xmlns:a14="http://schemas.microsoft.com/office/drawing/2010/main" val="0"/>
               </a:ext>
               <a:ext uri="{96DAC541-7B7A-43D3-8B79-37D633B846F1}">
-                <asvg:svgBlip xmlns:asvg="http://schemas.microsoft.com/office/drawing/2016/SVG/main" r:embed="rId4"/>
+                <asvg:svgBlip xmlns:asvg="http://schemas.microsoft.com/office/drawing/2016/SVG/main" r:embed="rId2"/>
               </a:ext>
             </a:extLst>
           </a:blip>
@@ -1272,13 +1272,13 @@
           <a:avLst/>
         </a:prstGeom>
         <a:blipFill>
-          <a:blip xmlns:r="http://schemas.openxmlformats.org/officeDocument/2006/relationships" r:embed="rId1">
+          <a:blip xmlns:r="http://schemas.openxmlformats.org/officeDocument/2006/relationships">
             <a:extLst>
               <a:ext uri="{28A0092B-C50C-407E-A947-70E740481C1C}">
                 <a14:useLocalDpi xmlns:a14="http://schemas.microsoft.com/office/drawing/2010/main" val="0"/>
               </a:ext>
               <a:ext uri="{96DAC541-7B7A-43D3-8B79-37D633B846F1}">
-                <asvg:svgBlip xmlns:asvg="http://schemas.microsoft.com/office/drawing/2016/SVG/main" r:embed="rId2"/>
+                <asvg:svgBlip xmlns:asvg="http://schemas.microsoft.com/office/drawing/2016/SVG/main" r:embed="rId1"/>
               </a:ext>
             </a:extLst>
           </a:blip>
@@ -1489,13 +1489,13 @@
           <a:avLst/>
         </a:prstGeom>
         <a:blipFill>
-          <a:blip xmlns:r="http://schemas.openxmlformats.org/officeDocument/2006/relationships" r:embed="rId3">
+          <a:blip xmlns:r="http://schemas.openxmlformats.org/officeDocument/2006/relationships">
             <a:extLst>
               <a:ext uri="{28A0092B-C50C-407E-A947-70E740481C1C}">
                 <a14:useLocalDpi xmlns:a14="http://schemas.microsoft.com/office/drawing/2010/main" val="0"/>
               </a:ext>
               <a:ext uri="{96DAC541-7B7A-43D3-8B79-37D633B846F1}">
-                <asvg:svgBlip xmlns:asvg="http://schemas.microsoft.com/office/drawing/2016/SVG/main" r:embed="rId4"/>
+                <asvg:svgBlip xmlns:asvg="http://schemas.microsoft.com/office/drawing/2016/SVG/main" r:embed="rId2"/>
               </a:ext>
             </a:extLst>
           </a:blip>
@@ -3037,7 +3037,7 @@
           <a:p>
             <a:fld id="{86D088FE-3E68-47FE-8BA4-634CD34BABBC}" type="datetimeFigureOut">
               <a:rPr lang="en-GB" smtClean="0"/>
-              <a:t>09/12/2025</a:t>
+              <a:t>04/08/2026</a:t>
             </a:fld>
             <a:endParaRPr lang="en-GB"/>
           </a:p>
@@ -3202,7 +3202,7 @@
           <a:p>
             <a:fld id="{1D6B66C6-1E92-0F4E-A300-9D4ED1F0C23F}" type="datetimeFigureOut">
               <a:rPr lang="en-GB" smtClean="0"/>
-              <a:t>09/12/2025</a:t>
+              <a:t>04/08/2026</a:t>
             </a:fld>
             <a:endParaRPr lang="en-GB"/>
           </a:p>
@@ -4920,13 +4920,13 @@
           <p:nvPr userDrawn="1"/>
         </p:nvPicPr>
         <p:blipFill>
-          <a:blip r:embed="rId2">
+          <a:blip>
             <a:extLst>
               <a:ext uri="{28A0092B-C50C-407E-A947-70E740481C1C}">
                 <a14:useLocalDpi xmlns:a14="http://schemas.microsoft.com/office/drawing/2010/main" val="0"/>
               </a:ext>
               <a:ext uri="{96DAC541-7B7A-43D3-8B79-37D633B846F1}">
-                <asvg:svgBlip xmlns:asvg="http://schemas.microsoft.com/office/drawing/2016/SVG/main" r:embed="rId3"/>
+                <asvg:svgBlip xmlns:asvg="http://schemas.microsoft.com/office/drawing/2016/SVG/main" r:embed="rId2"/>
               </a:ext>
             </a:extLst>
           </a:blip>
@@ -18733,13 +18733,13 @@
           <p:nvPr userDrawn="1"/>
         </p:nvPicPr>
         <p:blipFill>
-          <a:blip r:embed="rId2">
+          <a:blip>
             <a:extLst>
               <a:ext uri="{28A0092B-C50C-407E-A947-70E740481C1C}">
                 <a14:useLocalDpi xmlns:a14="http://schemas.microsoft.com/office/drawing/2010/main" val="0"/>
               </a:ext>
               <a:ext uri="{96DAC541-7B7A-43D3-8B79-37D633B846F1}">
-                <asvg:svgBlip xmlns:asvg="http://schemas.microsoft.com/office/drawing/2016/SVG/main" r:embed="rId3"/>
+                <asvg:svgBlip xmlns:asvg="http://schemas.microsoft.com/office/drawing/2016/SVG/main" r:embed="rId2"/>
               </a:ext>
             </a:extLst>
           </a:blip>
@@ -21574,13 +21574,13 @@
           <p:nvPr userDrawn="1"/>
         </p:nvPicPr>
         <p:blipFill>
-          <a:blip r:embed="rId2">
+          <a:blip>
             <a:extLst>
               <a:ext uri="{28A0092B-C50C-407E-A947-70E740481C1C}">
                 <a14:useLocalDpi xmlns:a14="http://schemas.microsoft.com/office/drawing/2010/main" val="0"/>
               </a:ext>
               <a:ext uri="{96DAC541-7B7A-43D3-8B79-37D633B846F1}">
-                <asvg:svgBlip xmlns:asvg="http://schemas.microsoft.com/office/drawing/2016/SVG/main" r:embed="rId3"/>
+                <asvg:svgBlip xmlns:asvg="http://schemas.microsoft.com/office/drawing/2016/SVG/main" r:embed="rId2"/>
               </a:ext>
             </a:extLst>
           </a:blip>
@@ -22633,13 +22633,13 @@
           <p:nvPr userDrawn="1"/>
         </p:nvPicPr>
         <p:blipFill>
-          <a:blip r:embed="rId2">
+          <a:blip>
             <a:extLst>
               <a:ext uri="{28A0092B-C50C-407E-A947-70E740481C1C}">
                 <a14:useLocalDpi xmlns:a14="http://schemas.microsoft.com/office/drawing/2010/main" val="0"/>
               </a:ext>
               <a:ext uri="{96DAC541-7B7A-43D3-8B79-37D633B846F1}">
-                <asvg:svgBlip xmlns:asvg="http://schemas.microsoft.com/office/drawing/2016/SVG/main" r:embed="rId3"/>
+                <asvg:svgBlip xmlns:asvg="http://schemas.microsoft.com/office/drawing/2016/SVG/main" r:embed="rId2"/>
               </a:ext>
             </a:extLst>
           </a:blip>
@@ -23443,13 +23443,13 @@
           <p:nvPr userDrawn="1"/>
         </p:nvPicPr>
         <p:blipFill>
-          <a:blip r:embed="rId2">
+          <a:blip>
             <a:extLst>
               <a:ext uri="{28A0092B-C50C-407E-A947-70E740481C1C}">
                 <a14:useLocalDpi xmlns:a14="http://schemas.microsoft.com/office/drawing/2010/main" val="0"/>
               </a:ext>
               <a:ext uri="{96DAC541-7B7A-43D3-8B79-37D633B846F1}">
-                <asvg:svgBlip xmlns:asvg="http://schemas.microsoft.com/office/drawing/2016/SVG/main" r:embed="rId3"/>
+                <asvg:svgBlip xmlns:asvg="http://schemas.microsoft.com/office/drawing/2016/SVG/main" r:embed="rId2"/>
               </a:ext>
             </a:extLst>
           </a:blip>
@@ -29419,13 +29419,13 @@
             <a:avLst/>
           </a:prstGeom>
           <a:blipFill>
-            <a:blip r:embed="rId3">
+            <a:blip>
               <a:extLst>
                 <a:ext uri="{28A0092B-C50C-407E-A947-70E740481C1C}">
                   <a14:useLocalDpi xmlns:a14="http://schemas.microsoft.com/office/drawing/2010/main" val="0"/>
                 </a:ext>
                 <a:ext uri="{96DAC541-7B7A-43D3-8B79-37D633B846F1}">
-                  <asvg:svgBlip xmlns:asvg="http://schemas.microsoft.com/office/drawing/2016/SVG/main" r:embed="rId4"/>
+                  <asvg:svgBlip xmlns:asvg="http://schemas.microsoft.com/office/drawing/2016/SVG/main" r:embed="rId3"/>
                 </a:ext>
               </a:extLst>
             </a:blip>
@@ -29485,13 +29485,13 @@
             <a:avLst/>
           </a:prstGeom>
           <a:blipFill>
-            <a:blip r:embed="rId5">
+            <a:blip>
               <a:extLst>
                 <a:ext uri="{28A0092B-C50C-407E-A947-70E740481C1C}">
                   <a14:useLocalDpi xmlns:a14="http://schemas.microsoft.com/office/drawing/2010/main" val="0"/>
                 </a:ext>
                 <a:ext uri="{96DAC541-7B7A-43D3-8B79-37D633B846F1}">
-                  <asvg:svgBlip xmlns:asvg="http://schemas.microsoft.com/office/drawing/2016/SVG/main" r:embed="rId6"/>
+                  <asvg:svgBlip xmlns:asvg="http://schemas.microsoft.com/office/drawing/2016/SVG/main" r:embed="rId4"/>
                 </a:ext>
               </a:extLst>
             </a:blip>
@@ -34217,7 +34217,25 @@
                 </a:solidFill>
                 <a:latin typeface="Consolas" panose="020B0609020204030204" pitchFamily="49" charset="0"/>
               </a:rPr>
-              <a:t>    internal Account()  {</a:t>
+              <a:t>    </a:t>
+            </a:r>
+            <a:r>
+              <a:rPr lang="en-GB" sz="1600" b="1" dirty="0">
+                <a:solidFill>
+                  <a:srgbClr val="000000"/>
+                </a:solidFill>
+                <a:latin typeface="Consolas" panose="020B0609020204030204" pitchFamily="49" charset="0"/>
+              </a:rPr>
+              <a:t>internal</a:t>
+            </a:r>
+            <a:r>
+              <a:rPr lang="en-GB" sz="1600" dirty="0">
+                <a:solidFill>
+                  <a:srgbClr val="000000"/>
+                </a:solidFill>
+                <a:latin typeface="Consolas" panose="020B0609020204030204" pitchFamily="49" charset="0"/>
+              </a:rPr>
+              <a:t> Account()  {</a:t>
             </a:r>
           </a:p>
           <a:p>
@@ -36666,32 +36684,6 @@
 </file>
 
 <file path=customXml/item1.xml><?xml version="1.0" encoding="utf-8"?>
-<?mso-contentType ?>
-<FormTemplates xmlns="http://schemas.microsoft.com/sharepoint/v3/contenttype/forms">
-  <Display>DocumentLibraryForm</Display>
-  <Edit>DocumentLibraryForm</Edit>
-  <New>DocumentLibraryForm</New>
-</FormTemplates>
-</file>
-
-<file path=customXml/item2.xml><?xml version="1.0" encoding="utf-8"?>
-<p:properties xmlns:p="http://schemas.microsoft.com/office/2006/metadata/properties" xmlns:xsi="http://www.w3.org/2001/XMLSchema-instance" xmlns:pc="http://schemas.microsoft.com/office/infopath/2007/PartnerControls">
-  <documentManagement>
-    <SequenceNumber xmlns="6794D9DE-4FDF-4DC0-8B2C-5438320C69D5" xsi:nil="true"/>
-    <IsBuildFile xmlns="6794D9DE-4FDF-4DC0-8B2C-5438320C69D5" xsi:nil="true"/>
-    <BookTypeField0 xmlns="6794D9DE-4FDF-4DC0-8B2C-5438320C69D5">
-      <Terms xmlns="http://schemas.microsoft.com/office/infopath/2007/PartnerControls">
-        <TermInfo xmlns="http://schemas.microsoft.com/office/infopath/2007/PartnerControls">
-          <TermName xmlns="http://schemas.microsoft.com/office/infopath/2007/PartnerControls">IK</TermName>
-          <TermId xmlns="http://schemas.microsoft.com/office/infopath/2007/PartnerControls">5abe6401-e87a-4499-80b4-3d21a1a6ebd7</TermId>
-        </TermInfo>
-      </Terms>
-    </BookTypeField0>
-  </documentManagement>
-</p:properties>
-</file>
-
-<file path=customXml/item3.xml><?xml version="1.0" encoding="utf-8"?>
 <ct:contentTypeSchema xmlns:ct="http://schemas.microsoft.com/office/2006/metadata/contentType" xmlns:ma="http://schemas.microsoft.com/office/2006/metadata/properties/metaAttributes" ct:_="" ma:_="" ma:contentTypeName="Courseware" ma:contentTypeID="0x010100F0967B7CEE8D417F966757887D9466FB00B3EF5B1D149FDF49B1880C030D548140" ma:contentTypeVersion="0" ma:contentTypeDescription="Base content type which represents courseware documents" ma:contentTypeScope="" ma:versionID="ab0d7ca79e0ea5a537b031f986da336c">
   <xsd:schema xmlns:xsd="http://www.w3.org/2001/XMLSchema" xmlns:xs="http://www.w3.org/2001/XMLSchema" xmlns:p="http://schemas.microsoft.com/office/2006/metadata/properties" xmlns:ns2="6794D9DE-4FDF-4DC0-8B2C-5438320C69D5" targetNamespace="http://schemas.microsoft.com/office/2006/metadata/properties" ma:root="true" ma:fieldsID="7ff8e7c62cc10108c036e94c947d8fb9" ns2:_="">
     <xsd:import namespace="6794D9DE-4FDF-4DC0-8B2C-5438320C69D5"/>
@@ -36831,10 +36823,46 @@
 </ct:contentTypeSchema>
 </file>
 
+<file path=customXml/item2.xml><?xml version="1.0" encoding="utf-8"?>
+<p:properties xmlns:p="http://schemas.microsoft.com/office/2006/metadata/properties" xmlns:xsi="http://www.w3.org/2001/XMLSchema-instance" xmlns:pc="http://schemas.microsoft.com/office/infopath/2007/PartnerControls">
+  <documentManagement>
+    <SequenceNumber xmlns="6794D9DE-4FDF-4DC0-8B2C-5438320C69D5" xsi:nil="true"/>
+    <IsBuildFile xmlns="6794D9DE-4FDF-4DC0-8B2C-5438320C69D5" xsi:nil="true"/>
+    <BookTypeField0 xmlns="6794D9DE-4FDF-4DC0-8B2C-5438320C69D5">
+      <Terms xmlns="http://schemas.microsoft.com/office/infopath/2007/PartnerControls">
+        <TermInfo xmlns="http://schemas.microsoft.com/office/infopath/2007/PartnerControls">
+          <TermName xmlns="http://schemas.microsoft.com/office/infopath/2007/PartnerControls">IK</TermName>
+          <TermId xmlns="http://schemas.microsoft.com/office/infopath/2007/PartnerControls">5abe6401-e87a-4499-80b4-3d21a1a6ebd7</TermId>
+        </TermInfo>
+      </Terms>
+    </BookTypeField0>
+  </documentManagement>
+</p:properties>
+</file>
+
+<file path=customXml/item3.xml><?xml version="1.0" encoding="utf-8"?>
+<?mso-contentType ?>
+<FormTemplates xmlns="http://schemas.microsoft.com/sharepoint/v3/contenttype/forms">
+  <Display>DocumentLibraryForm</Display>
+  <Edit>DocumentLibraryForm</Edit>
+  <New>DocumentLibraryForm</New>
+</FormTemplates>
+</file>
+
 <file path=customXml/itemProps1.xml><?xml version="1.0" encoding="utf-8"?>
-<ds:datastoreItem xmlns:ds="http://schemas.openxmlformats.org/officeDocument/2006/customXml" ds:itemID="{DA141400-90D0-43B3-B64F-3F2A440B3515}">
+<ds:datastoreItem xmlns:ds="http://schemas.openxmlformats.org/officeDocument/2006/customXml" ds:itemID="{3271DF08-82F2-4A02-867C-B628BF8B692B}">
   <ds:schemaRefs>
-    <ds:schemaRef ds:uri="http://schemas.microsoft.com/sharepoint/v3/contenttype/forms"/>
+    <ds:schemaRef ds:uri="http://schemas.microsoft.com/office/2006/metadata/contentType"/>
+    <ds:schemaRef ds:uri="http://schemas.microsoft.com/office/2006/metadata/properties/metaAttributes"/>
+    <ds:schemaRef ds:uri="http://www.w3.org/2001/XMLSchema"/>
+    <ds:schemaRef ds:uri="http://schemas.microsoft.com/office/2006/metadata/properties"/>
+    <ds:schemaRef ds:uri="6794D9DE-4FDF-4DC0-8B2C-5438320C69D5"/>
+    <ds:schemaRef ds:uri="http://schemas.microsoft.com/office/2006/documentManagement/types"/>
+    <ds:schemaRef ds:uri="http://schemas.microsoft.com/office/infopath/2007/PartnerControls"/>
+    <ds:schemaRef ds:uri="http://schemas.openxmlformats.org/package/2006/metadata/core-properties"/>
+    <ds:schemaRef ds:uri="http://purl.org/dc/elements/1.1/"/>
+    <ds:schemaRef ds:uri="http://purl.org/dc/terms/"/>
+    <ds:schemaRef ds:uri="http://schemas.microsoft.com/internal/obd"/>
   </ds:schemaRefs>
 </ds:datastoreItem>
 </file>
@@ -36850,19 +36878,9 @@
 </file>
 
 <file path=customXml/itemProps3.xml><?xml version="1.0" encoding="utf-8"?>
-<ds:datastoreItem xmlns:ds="http://schemas.openxmlformats.org/officeDocument/2006/customXml" ds:itemID="{3271DF08-82F2-4A02-867C-B628BF8B692B}">
+<ds:datastoreItem xmlns:ds="http://schemas.openxmlformats.org/officeDocument/2006/customXml" ds:itemID="{DA141400-90D0-43B3-B64F-3F2A440B3515}">
   <ds:schemaRefs>
-    <ds:schemaRef ds:uri="http://schemas.microsoft.com/office/2006/metadata/contentType"/>
-    <ds:schemaRef ds:uri="http://schemas.microsoft.com/office/2006/metadata/properties/metaAttributes"/>
-    <ds:schemaRef ds:uri="http://www.w3.org/2001/XMLSchema"/>
-    <ds:schemaRef ds:uri="http://schemas.microsoft.com/office/2006/metadata/properties"/>
-    <ds:schemaRef ds:uri="6794D9DE-4FDF-4DC0-8B2C-5438320C69D5"/>
-    <ds:schemaRef ds:uri="http://schemas.microsoft.com/office/2006/documentManagement/types"/>
-    <ds:schemaRef ds:uri="http://schemas.microsoft.com/office/infopath/2007/PartnerControls"/>
-    <ds:schemaRef ds:uri="http://schemas.openxmlformats.org/package/2006/metadata/core-properties"/>
-    <ds:schemaRef ds:uri="http://purl.org/dc/elements/1.1/"/>
-    <ds:schemaRef ds:uri="http://purl.org/dc/terms/"/>
-    <ds:schemaRef ds:uri="http://schemas.microsoft.com/internal/obd"/>
+    <ds:schemaRef ds:uri="http://schemas.microsoft.com/sharepoint/v3/contenttype/forms"/>
   </ds:schemaRefs>
 </ds:datastoreItem>
 </file>